--- a/decks/geog-climate-change/geog-climate-change_ch2_causes.pptx
+++ b/decks/geog-climate-change/geog-climate-change_ch2_causes.pptx
@@ -125,30 +125,30 @@
   <p:extLst>
     <p:ext uri="{521415D9-36F7-43E2-AB2F-B90AF26B5E84}">
       <p14:sectionLst xmlns:p14="http://schemas.microsoft.com/office/powerpoint/2010/main">
-        <p14:section name="Opening" id="{d7efc3ee-e413-0333-6430-ed7fb79f8200}">
+        <p14:section name="Opening" id="{222de3c1-a058-0114-734c-32becbe7ef46}">
           <p14:sldIdLst>
             <p14:sldId id="256"/>
           </p14:sldIdLst>
         </p14:section>
-        <p14:section name="Gate" id="{0e3c8f58-b1fd-b3bc-d4f6-d8b8608db540}">
+        <p14:section name="Gate" id="{27397765-9b7c-7a70-0e16-df067f502fd1}">
           <p14:sldIdLst>
             <p14:sldId id="257"/>
             <p14:sldId id="258"/>
           </p14:sldIdLst>
         </p14:section>
-        <p14:section name="Pre-teach" id="{91759692-bf0f-75ac-f230-e1c30aaf12b3}">
+        <p14:section name="Pre-teach" id="{2c4f72f0-db10-8d46-693b-3b8af206af50}">
           <p14:sldIdLst>
             <p14:sldId id="259"/>
             <p14:sldId id="260"/>
           </p14:sldIdLst>
         </p14:section>
-        <p14:section name="Read-along" id="{7d8a5fa8-caf1-792a-c818-42e7bd8f828f}">
+        <p14:section name="Read-along" id="{de370a76-c4f2-c397-b09d-34d2d67c7648}">
           <p14:sldIdLst>
             <p14:sldId id="261"/>
             <p14:sldId id="262"/>
           </p14:sldIdLst>
         </p14:section>
-        <p14:section name="Teach" id="{4a0366d8-e291-9048-4ac2-5d337e0cf463}">
+        <p14:section name="Teach" id="{33ca9a73-c9a0-73ba-5245-31f9c987d0e0}">
           <p14:sldIdLst>
             <p14:sldId id="263"/>
             <p14:sldId id="264"/>
@@ -156,7 +156,7 @@
             <p14:sldId id="266"/>
           </p14:sldIdLst>
         </p14:section>
-        <p14:section name="Routes" id="{aebbff4f-2b35-6ac7-2126-596b73689bd3}">
+        <p14:section name="Routes" id="{3f73e85f-f7d2-2711-e966-f0b52778cd10}">
           <p14:sldIdLst>
             <p14:sldId id="267"/>
             <p14:sldId id="268"/>
@@ -164,12 +164,12 @@
             <p14:sldId id="270"/>
           </p14:sldIdLst>
         </p14:section>
-        <p14:section name="Close" id="{4c88cb79-0ebb-06e3-9bb5-f64acb8498b0}">
+        <p14:section name="Close" id="{27844e74-d105-210d-478c-f5afb8055837}">
           <p14:sldIdLst>
             <p14:sldId id="271"/>
           </p14:sldIdLst>
         </p14:section>
-        <p14:section name="Answers" id="{3993f5e2-0511-5fda-e0c3-f36ce7fd7a24}">
+        <p14:section name="Answers" id="{97860196-1187-2fe0-2e5b-68f30e7924c2}">
           <p14:sldIdLst>
             <p14:sldId id="272"/>
             <p14:sldId id="273"/>
